--- a/test-files/vortrag.pptx
+++ b/test-files/vortrag.pptx
@@ -693,7 +693,7 @@
 </file>
 
 <file path=ppt/theme/theme1.xml><?xml version="1.0" encoding="utf-8"?>
-<a:theme xmlns:a="http://schemas.openxmlformats.org/drawingml/2006/main" name="Stapel">
+<a:theme xmlns:a="http://schemas.openxmlformats.org/drawingml/2006/main" name="Schreibzeug">
   <a:themeElements>
     <a:clrScheme name="Office">
       <a:dk1>
